--- a/design/pptx-slides/output/ClaudeCodeSlides.pptx
+++ b/design/pptx-slides/output/ClaudeCodeSlides.pptx
@@ -17,8 +17,8 @@
   <p:notesMasterIdLst>
     <p:notesMasterId r:id="rId10"/>
   </p:notesMasterIdLst>
-  <p:sldSz cx="9144000" cy="6858000"/>
-  <p:notesSz cx="6858000" cy="9144000"/>
+  <p:sldSz cx="9144000" cy="5143500"/>
+  <p:notesSz cx="5143500" cy="9144000"/>
   <p:defaultTextStyle>
     <a:lvl1pPr marL="0" algn="l" defTabSz="914400" rtl="0" eaLnBrk="1" latinLnBrk="0" hangingPunct="1">
       <a:defRPr sz="1800" kern="1200">
@@ -1506,8 +1506,8 @@
         </p:nvSpPr>
         <p:spPr>
           <a:xfrm>
-            <a:off x="7040880" y="822960"/>
-            <a:ext cx="1828800" cy="1828800"/>
+            <a:off x="7040880" y="617220"/>
+            <a:ext cx="1828800" cy="1371600"/>
           </a:xfrm>
           <a:prstGeom prst="ellipse">
             <a:avLst/>
@@ -1533,12 +1533,12 @@
         </p:nvSpPr>
         <p:spPr>
           <a:xfrm>
-            <a:off x="548640" y="502920"/>
-            <a:ext cx="1463040" cy="274320"/>
+            <a:off x="548640" y="377647"/>
+            <a:ext cx="1463040" cy="205740"/>
           </a:xfrm>
           <a:prstGeom prst="roundRect">
             <a:avLst>
-              <a:gd name="adj" fmla="val 33333"/>
+              <a:gd name="adj" fmla="val 44444"/>
             </a:avLst>
           </a:prstGeom>
           <a:solidFill>
@@ -1560,8 +1560,8 @@
         </p:nvSpPr>
         <p:spPr>
           <a:xfrm>
-            <a:off x="548640" y="502920"/>
-            <a:ext cx="1463040" cy="274320"/>
+            <a:off x="548640" y="377647"/>
+            <a:ext cx="1463040" cy="205740"/>
           </a:xfrm>
           <a:prstGeom prst="rect">
             <a:avLst/>
@@ -1599,8 +1599,8 @@
         </p:nvSpPr>
         <p:spPr>
           <a:xfrm>
-            <a:off x="548640" y="914400"/>
-            <a:ext cx="7772400" cy="777240"/>
+            <a:off x="548640" y="685800"/>
+            <a:ext cx="7772400" cy="583387"/>
           </a:xfrm>
           <a:prstGeom prst="rect">
             <a:avLst/>
@@ -1638,62 +1638,62 @@
         </p:nvSpPr>
         <p:spPr>
           <a:xfrm>
+            <a:off x="548640" y="1337767"/>
+            <a:ext cx="6858000" cy="342900"/>
+          </a:xfrm>
+          <a:prstGeom prst="rect">
+            <a:avLst/>
+          </a:prstGeom>
+          <a:noFill/>
+          <a:ln/>
+        </p:spPr>
+        <p:txBody>
+          <a:bodyPr wrap="square" rtlCol="0" anchor="ctr"/>
+          <a:lstStyle/>
+          <a:p>
+            <a:pPr indent="0" marL="0">
+              <a:buNone/>
+            </a:pPr>
+            <a:r>
+              <a:rPr lang="en-US" sz="2200" dirty="0">
+                <a:solidFill>
+                  <a:srgbClr val="B4EAFF"/>
+                </a:solidFill>
+                <a:latin typeface="Montserrat" pitchFamily="34" charset="0"/>
+                <a:ea typeface="Montserrat" pitchFamily="34" charset="-122"/>
+                <a:cs typeface="Montserrat" pitchFamily="34" charset="-120"/>
+              </a:rPr>
+              <a:t>From Setup to Business Value</a:t>
+            </a:r>
+            <a:endParaRPr lang="en-US" sz="2200" dirty="0"/>
+          </a:p>
+        </p:txBody>
+      </p:sp>
+      <p:sp>
+        <p:nvSpPr>
+          <p:cNvPr id="7" name="Text 5"/>
+          <p:cNvSpPr/>
+          <p:nvPr/>
+        </p:nvSpPr>
+        <p:spPr>
+          <a:xfrm>
             <a:off x="548640" y="1783080"/>
-            <a:ext cx="6858000" cy="457200"/>
-          </a:xfrm>
-          <a:prstGeom prst="rect">
-            <a:avLst/>
-          </a:prstGeom>
-          <a:noFill/>
-          <a:ln/>
-        </p:spPr>
-        <p:txBody>
-          <a:bodyPr wrap="square" rtlCol="0" anchor="ctr"/>
+            <a:ext cx="5943600" cy="411480"/>
+          </a:xfrm>
+          <a:prstGeom prst="rect">
+            <a:avLst/>
+          </a:prstGeom>
+          <a:noFill/>
+          <a:ln/>
+        </p:spPr>
+        <p:txBody>
+          <a:bodyPr wrap="square" rtlCol="0" anchor="t"/>
           <a:lstStyle/>
           <a:p>
             <a:pPr indent="0" marL="0">
               <a:buNone/>
             </a:pPr>
             <a:r>
-              <a:rPr lang="en-US" sz="2200" dirty="0">
-                <a:solidFill>
-                  <a:srgbClr val="B4EAFF"/>
-                </a:solidFill>
-                <a:latin typeface="Montserrat" pitchFamily="34" charset="0"/>
-                <a:ea typeface="Montserrat" pitchFamily="34" charset="-122"/>
-                <a:cs typeface="Montserrat" pitchFamily="34" charset="-120"/>
-              </a:rPr>
-              <a:t>From Setup to Business Value</a:t>
-            </a:r>
-            <a:endParaRPr lang="en-US" sz="2200" dirty="0"/>
-          </a:p>
-        </p:txBody>
-      </p:sp>
-      <p:sp>
-        <p:nvSpPr>
-          <p:cNvPr id="7" name="Text 5"/>
-          <p:cNvSpPr/>
-          <p:nvPr/>
-        </p:nvSpPr>
-        <p:spPr>
-          <a:xfrm>
-            <a:off x="548640" y="2377440"/>
-            <a:ext cx="5943600" cy="548640"/>
-          </a:xfrm>
-          <a:prstGeom prst="rect">
-            <a:avLst/>
-          </a:prstGeom>
-          <a:noFill/>
-          <a:ln/>
-        </p:spPr>
-        <p:txBody>
-          <a:bodyPr wrap="square" rtlCol="0" anchor="t"/>
-          <a:lstStyle/>
-          <a:p>
-            <a:pPr indent="0" marL="0">
-              <a:buNone/>
-            </a:pPr>
-            <a:r>
               <a:rPr lang="en-US" sz="1400" dirty="0">
                 <a:solidFill>
                   <a:srgbClr val="FFFFFF"/>
@@ -1716,8 +1716,8 @@
         </p:nvSpPr>
         <p:spPr>
           <a:xfrm>
-            <a:off x="7132320" y="1188720"/>
-            <a:ext cx="1371600" cy="109728"/>
+            <a:off x="7132320" y="891540"/>
+            <a:ext cx="1371600" cy="82296"/>
           </a:xfrm>
           <a:prstGeom prst="rect">
             <a:avLst/>
@@ -1741,8 +1741,8 @@
         </p:nvSpPr>
         <p:spPr>
           <a:xfrm>
-            <a:off x="7132320" y="1353312"/>
-            <a:ext cx="1371600" cy="109728"/>
+            <a:off x="7132320" y="1014984"/>
+            <a:ext cx="1371600" cy="82296"/>
           </a:xfrm>
           <a:prstGeom prst="rect">
             <a:avLst/>
@@ -1766,8 +1766,8 @@
         </p:nvSpPr>
         <p:spPr>
           <a:xfrm>
-            <a:off x="7132320" y="1517904"/>
-            <a:ext cx="1371600" cy="109728"/>
+            <a:off x="7132320" y="1138428"/>
+            <a:ext cx="1371600" cy="82296"/>
           </a:xfrm>
           <a:prstGeom prst="rect">
             <a:avLst/>
@@ -1791,8 +1791,8 @@
         </p:nvSpPr>
         <p:spPr>
           <a:xfrm>
-            <a:off x="0" y="6492240"/>
-            <a:ext cx="9144000" cy="365760"/>
+            <a:off x="0" y="4869180"/>
+            <a:ext cx="9144000" cy="274320"/>
           </a:xfrm>
           <a:prstGeom prst="rect">
             <a:avLst/>
@@ -1816,8 +1816,8 @@
         </p:nvSpPr>
         <p:spPr>
           <a:xfrm>
-            <a:off x="274320" y="6492240"/>
-            <a:ext cx="4114800" cy="365760"/>
+            <a:off x="274320" y="4869180"/>
+            <a:ext cx="4114800" cy="274320"/>
           </a:xfrm>
           <a:prstGeom prst="rect">
             <a:avLst/>
@@ -1855,8 +1855,8 @@
         </p:nvSpPr>
         <p:spPr>
           <a:xfrm>
-            <a:off x="4754880" y="6492240"/>
-            <a:ext cx="4114800" cy="365760"/>
+            <a:off x="4754880" y="4869180"/>
+            <a:ext cx="4114800" cy="274320"/>
           </a:xfrm>
           <a:prstGeom prst="rect">
             <a:avLst/>
@@ -1927,7 +1927,7 @@
         <p:spPr>
           <a:xfrm>
             <a:off x="0" y="0"/>
-            <a:ext cx="9144000" cy="640080"/>
+            <a:ext cx="9144000" cy="480060"/>
           </a:xfrm>
           <a:prstGeom prst="rect">
             <a:avLst/>
@@ -1952,7 +1952,7 @@
         <p:spPr>
           <a:xfrm>
             <a:off x="548640" y="0"/>
-            <a:ext cx="8229600" cy="640080"/>
+            <a:ext cx="8229600" cy="480060"/>
           </a:xfrm>
           <a:prstGeom prst="rect">
             <a:avLst/>
@@ -1990,8 +1990,8 @@
         </p:nvSpPr>
         <p:spPr>
           <a:xfrm>
-            <a:off x="457200" y="914400"/>
-            <a:ext cx="4754880" cy="1097280"/>
+            <a:off x="457200" y="685800"/>
+            <a:ext cx="4754880" cy="822960"/>
           </a:xfrm>
           <a:prstGeom prst="rect">
             <a:avLst/>
@@ -2029,8 +2029,8 @@
         </p:nvSpPr>
         <p:spPr>
           <a:xfrm>
-            <a:off x="457200" y="2286000"/>
-            <a:ext cx="73152" cy="320040"/>
+            <a:off x="457200" y="1285646"/>
+            <a:ext cx="73152" cy="239573"/>
           </a:xfrm>
           <a:prstGeom prst="rect">
             <a:avLst/>
@@ -2054,8 +2054,8 @@
         </p:nvSpPr>
         <p:spPr>
           <a:xfrm>
-            <a:off x="640080" y="2286000"/>
-            <a:ext cx="4572000" cy="320040"/>
+            <a:off x="640080" y="1285646"/>
+            <a:ext cx="4572000" cy="239573"/>
           </a:xfrm>
           <a:prstGeom prst="rect">
             <a:avLst/>
@@ -2093,8 +2093,8 @@
         </p:nvSpPr>
         <p:spPr>
           <a:xfrm>
-            <a:off x="457200" y="2926080"/>
-            <a:ext cx="73152" cy="320040"/>
+            <a:off x="457200" y="1645920"/>
+            <a:ext cx="73152" cy="239573"/>
           </a:xfrm>
           <a:prstGeom prst="rect">
             <a:avLst/>
@@ -2118,8 +2118,8 @@
         </p:nvSpPr>
         <p:spPr>
           <a:xfrm>
-            <a:off x="640080" y="2926080"/>
-            <a:ext cx="4572000" cy="320040"/>
+            <a:off x="640080" y="1645920"/>
+            <a:ext cx="4572000" cy="239573"/>
           </a:xfrm>
           <a:prstGeom prst="rect">
             <a:avLst/>
@@ -2157,8 +2157,8 @@
         </p:nvSpPr>
         <p:spPr>
           <a:xfrm>
-            <a:off x="457200" y="3566160"/>
-            <a:ext cx="73152" cy="320040"/>
+            <a:off x="457200" y="2006194"/>
+            <a:ext cx="73152" cy="239573"/>
           </a:xfrm>
           <a:prstGeom prst="rect">
             <a:avLst/>
@@ -2182,8 +2182,8 @@
         </p:nvSpPr>
         <p:spPr>
           <a:xfrm>
-            <a:off x="640080" y="3566160"/>
-            <a:ext cx="4572000" cy="320040"/>
+            <a:off x="640080" y="2006194"/>
+            <a:ext cx="4572000" cy="239573"/>
           </a:xfrm>
           <a:prstGeom prst="rect">
             <a:avLst/>
@@ -2221,8 +2221,8 @@
         </p:nvSpPr>
         <p:spPr>
           <a:xfrm>
-            <a:off x="5669280" y="914400"/>
-            <a:ext cx="3017520" cy="1371600"/>
+            <a:off x="5669280" y="514807"/>
+            <a:ext cx="3017520" cy="1028700"/>
           </a:xfrm>
           <a:prstGeom prst="rect">
             <a:avLst/>
@@ -2253,8 +2253,8 @@
         </p:nvSpPr>
         <p:spPr>
           <a:xfrm>
-            <a:off x="5669280" y="914400"/>
-            <a:ext cx="73152" cy="1371600"/>
+            <a:off x="5669280" y="514807"/>
+            <a:ext cx="73152" cy="1028700"/>
           </a:xfrm>
           <a:prstGeom prst="rect">
             <a:avLst/>
@@ -2278,8 +2278,8 @@
         </p:nvSpPr>
         <p:spPr>
           <a:xfrm>
-            <a:off x="5833872" y="1024128"/>
-            <a:ext cx="2788920" cy="320040"/>
+            <a:off x="5833872" y="597103"/>
+            <a:ext cx="2788920" cy="239573"/>
           </a:xfrm>
           <a:prstGeom prst="rect">
             <a:avLst/>
@@ -2317,8 +2317,8 @@
         </p:nvSpPr>
         <p:spPr>
           <a:xfrm>
-            <a:off x="5833872" y="1399032"/>
-            <a:ext cx="2788920" cy="731520"/>
+            <a:off x="5833872" y="878738"/>
+            <a:ext cx="2788920" cy="548640"/>
           </a:xfrm>
           <a:prstGeom prst="rect">
             <a:avLst/>
@@ -2356,8 +2356,8 @@
         </p:nvSpPr>
         <p:spPr>
           <a:xfrm>
-            <a:off x="5669280" y="2423160"/>
-            <a:ext cx="3017520" cy="1371600"/>
+            <a:off x="5669280" y="1362456"/>
+            <a:ext cx="3017520" cy="1028700"/>
           </a:xfrm>
           <a:prstGeom prst="rect">
             <a:avLst/>
@@ -2388,8 +2388,8 @@
         </p:nvSpPr>
         <p:spPr>
           <a:xfrm>
-            <a:off x="5669280" y="2423160"/>
-            <a:ext cx="73152" cy="1371600"/>
+            <a:off x="5669280" y="1362456"/>
+            <a:ext cx="73152" cy="1028700"/>
           </a:xfrm>
           <a:prstGeom prst="rect">
             <a:avLst/>
@@ -2413,8 +2413,8 @@
         </p:nvSpPr>
         <p:spPr>
           <a:xfrm>
-            <a:off x="5833872" y="2532888"/>
-            <a:ext cx="2788920" cy="320040"/>
+            <a:off x="5833872" y="1444752"/>
+            <a:ext cx="2788920" cy="239573"/>
           </a:xfrm>
           <a:prstGeom prst="rect">
             <a:avLst/>
@@ -2452,8 +2452,8 @@
         </p:nvSpPr>
         <p:spPr>
           <a:xfrm>
-            <a:off x="5833872" y="2907792"/>
-            <a:ext cx="2788920" cy="731520"/>
+            <a:off x="5833872" y="1726387"/>
+            <a:ext cx="2788920" cy="548640"/>
           </a:xfrm>
           <a:prstGeom prst="rect">
             <a:avLst/>
@@ -2491,8 +2491,8 @@
         </p:nvSpPr>
         <p:spPr>
           <a:xfrm>
-            <a:off x="5669280" y="3931920"/>
-            <a:ext cx="3017520" cy="1371600"/>
+            <a:off x="5669280" y="2211934"/>
+            <a:ext cx="3017520" cy="1028700"/>
           </a:xfrm>
           <a:prstGeom prst="rect">
             <a:avLst/>
@@ -2523,8 +2523,8 @@
         </p:nvSpPr>
         <p:spPr>
           <a:xfrm>
-            <a:off x="5669280" y="3931920"/>
-            <a:ext cx="73152" cy="1371600"/>
+            <a:off x="5669280" y="2211934"/>
+            <a:ext cx="73152" cy="1028700"/>
           </a:xfrm>
           <a:prstGeom prst="rect">
             <a:avLst/>
@@ -2548,8 +2548,8 @@
         </p:nvSpPr>
         <p:spPr>
           <a:xfrm>
-            <a:off x="5833872" y="4041648"/>
-            <a:ext cx="2788920" cy="320040"/>
+            <a:off x="5833872" y="2294230"/>
+            <a:ext cx="2788920" cy="239573"/>
           </a:xfrm>
           <a:prstGeom prst="rect">
             <a:avLst/>
@@ -2587,8 +2587,8 @@
         </p:nvSpPr>
         <p:spPr>
           <a:xfrm>
-            <a:off x="5833872" y="4416552"/>
-            <a:ext cx="2788920" cy="731520"/>
+            <a:off x="5833872" y="2575865"/>
+            <a:ext cx="2788920" cy="548640"/>
           </a:xfrm>
           <a:prstGeom prst="rect">
             <a:avLst/>
@@ -2659,7 +2659,7 @@
         <p:spPr>
           <a:xfrm>
             <a:off x="0" y="0"/>
-            <a:ext cx="9144000" cy="640080"/>
+            <a:ext cx="9144000" cy="480060"/>
           </a:xfrm>
           <a:prstGeom prst="rect">
             <a:avLst/>
@@ -2684,7 +2684,7 @@
         <p:spPr>
           <a:xfrm>
             <a:off x="548640" y="0"/>
-            <a:ext cx="8229600" cy="640080"/>
+            <a:ext cx="8229600" cy="480060"/>
           </a:xfrm>
           <a:prstGeom prst="rect">
             <a:avLst/>
@@ -2722,8 +2722,8 @@
         </p:nvSpPr>
         <p:spPr>
           <a:xfrm>
-            <a:off x="457200" y="868680"/>
-            <a:ext cx="640080" cy="640080"/>
+            <a:off x="457200" y="651053"/>
+            <a:ext cx="640080" cy="480060"/>
           </a:xfrm>
           <a:prstGeom prst="ellipse">
             <a:avLst/>
@@ -2747,8 +2747,8 @@
         </p:nvSpPr>
         <p:spPr>
           <a:xfrm>
-            <a:off x="457200" y="868680"/>
-            <a:ext cx="640080" cy="640080"/>
+            <a:off x="457200" y="651053"/>
+            <a:ext cx="640080" cy="480060"/>
           </a:xfrm>
           <a:prstGeom prst="rect">
             <a:avLst/>
@@ -2786,8 +2786,8 @@
         </p:nvSpPr>
         <p:spPr>
           <a:xfrm>
-            <a:off x="1280160" y="960120"/>
-            <a:ext cx="7406640" cy="457200"/>
+            <a:off x="1280160" y="720547"/>
+            <a:ext cx="7406640" cy="342900"/>
           </a:xfrm>
           <a:prstGeom prst="rect">
             <a:avLst/>
@@ -2825,8 +2825,8 @@
         </p:nvSpPr>
         <p:spPr>
           <a:xfrm>
-            <a:off x="457200" y="1691640"/>
-            <a:ext cx="8229600" cy="1371600"/>
+            <a:off x="457200" y="1269187"/>
+            <a:ext cx="8229600" cy="1028700"/>
           </a:xfrm>
           <a:prstGeom prst="rect">
             <a:avLst/>
@@ -2857,8 +2857,8 @@
         </p:nvSpPr>
         <p:spPr>
           <a:xfrm>
-            <a:off x="640080" y="1783080"/>
-            <a:ext cx="7863840" cy="1188720"/>
+            <a:off x="640080" y="1337767"/>
+            <a:ext cx="7863840" cy="891540"/>
           </a:xfrm>
           <a:prstGeom prst="rect">
             <a:avLst/>
@@ -2964,8 +2964,8 @@
         </p:nvSpPr>
         <p:spPr>
           <a:xfrm>
-            <a:off x="457200" y="3246120"/>
-            <a:ext cx="2743200" cy="320040"/>
+            <a:off x="457200" y="2434133"/>
+            <a:ext cx="2743200" cy="239573"/>
           </a:xfrm>
           <a:prstGeom prst="rect">
             <a:avLst/>
@@ -3003,12 +3003,12 @@
         </p:nvSpPr>
         <p:spPr>
           <a:xfrm>
-            <a:off x="457200" y="3639312"/>
-            <a:ext cx="1371600" cy="292608"/>
+            <a:off x="457200" y="2729484"/>
+            <a:ext cx="1371600" cy="219456"/>
           </a:xfrm>
           <a:prstGeom prst="roundRect">
             <a:avLst>
-              <a:gd name="adj" fmla="val 31250"/>
+              <a:gd name="adj" fmla="val 41667"/>
             </a:avLst>
           </a:prstGeom>
           <a:solidFill>
@@ -3030,8 +3030,8 @@
         </p:nvSpPr>
         <p:spPr>
           <a:xfrm>
-            <a:off x="457200" y="3639312"/>
-            <a:ext cx="1371600" cy="292608"/>
+            <a:off x="457200" y="2729484"/>
+            <a:ext cx="1371600" cy="219456"/>
           </a:xfrm>
           <a:prstGeom prst="rect">
             <a:avLst/>
@@ -3069,12 +3069,12 @@
         </p:nvSpPr>
         <p:spPr>
           <a:xfrm>
-            <a:off x="1965960" y="3639312"/>
-            <a:ext cx="1188720" cy="292608"/>
+            <a:off x="1965960" y="2729484"/>
+            <a:ext cx="1188720" cy="219456"/>
           </a:xfrm>
           <a:prstGeom prst="roundRect">
             <a:avLst>
-              <a:gd name="adj" fmla="val 31250"/>
+              <a:gd name="adj" fmla="val 41667"/>
             </a:avLst>
           </a:prstGeom>
           <a:solidFill>
@@ -3096,8 +3096,8 @@
         </p:nvSpPr>
         <p:spPr>
           <a:xfrm>
-            <a:off x="1965960" y="3639312"/>
-            <a:ext cx="1188720" cy="292608"/>
+            <a:off x="1965960" y="2729484"/>
+            <a:ext cx="1188720" cy="219456"/>
           </a:xfrm>
           <a:prstGeom prst="rect">
             <a:avLst/>
@@ -3135,12 +3135,12 @@
         </p:nvSpPr>
         <p:spPr>
           <a:xfrm>
-            <a:off x="3291840" y="3639312"/>
-            <a:ext cx="1737360" cy="292608"/>
+            <a:off x="3291840" y="2729484"/>
+            <a:ext cx="1737360" cy="219456"/>
           </a:xfrm>
           <a:prstGeom prst="roundRect">
             <a:avLst>
-              <a:gd name="adj" fmla="val 31250"/>
+              <a:gd name="adj" fmla="val 41667"/>
             </a:avLst>
           </a:prstGeom>
           <a:solidFill>
@@ -3162,8 +3162,8 @@
         </p:nvSpPr>
         <p:spPr>
           <a:xfrm>
-            <a:off x="3291840" y="3639312"/>
-            <a:ext cx="1737360" cy="292608"/>
+            <a:off x="3291840" y="2729484"/>
+            <a:ext cx="1737360" cy="219456"/>
           </a:xfrm>
           <a:prstGeom prst="rect">
             <a:avLst/>
@@ -3201,8 +3201,8 @@
         </p:nvSpPr>
         <p:spPr>
           <a:xfrm>
-            <a:off x="457200" y="4069080"/>
-            <a:ext cx="8229600" cy="1051560"/>
+            <a:off x="457200" y="3052267"/>
+            <a:ext cx="8229600" cy="788213"/>
           </a:xfrm>
           <a:prstGeom prst="rect">
             <a:avLst/>
@@ -3233,8 +3233,8 @@
         </p:nvSpPr>
         <p:spPr>
           <a:xfrm>
-            <a:off x="640080" y="4114800"/>
-            <a:ext cx="7863840" cy="960120"/>
+            <a:off x="640080" y="3086100"/>
+            <a:ext cx="7863840" cy="720547"/>
           </a:xfrm>
           <a:prstGeom prst="rect">
             <a:avLst/>
@@ -3272,8 +3272,8 @@
         </p:nvSpPr>
         <p:spPr>
           <a:xfrm>
-            <a:off x="457200" y="5257800"/>
-            <a:ext cx="8229600" cy="365760"/>
+            <a:off x="457200" y="3943807"/>
+            <a:ext cx="8229600" cy="274320"/>
           </a:xfrm>
           <a:prstGeom prst="rect">
             <a:avLst/>
@@ -3344,7 +3344,7 @@
         <p:spPr>
           <a:xfrm>
             <a:off x="0" y="0"/>
-            <a:ext cx="9144000" cy="640080"/>
+            <a:ext cx="9144000" cy="480060"/>
           </a:xfrm>
           <a:prstGeom prst="rect">
             <a:avLst/>
@@ -3369,7 +3369,7 @@
         <p:spPr>
           <a:xfrm>
             <a:off x="548640" y="0"/>
-            <a:ext cx="8229600" cy="640080"/>
+            <a:ext cx="8229600" cy="480060"/>
           </a:xfrm>
           <a:prstGeom prst="rect">
             <a:avLst/>
@@ -3407,8 +3407,8 @@
         </p:nvSpPr>
         <p:spPr>
           <a:xfrm>
-            <a:off x="457200" y="868680"/>
-            <a:ext cx="640080" cy="640080"/>
+            <a:off x="457200" y="651053"/>
+            <a:ext cx="640080" cy="480060"/>
           </a:xfrm>
           <a:prstGeom prst="ellipse">
             <a:avLst/>
@@ -3432,8 +3432,8 @@
         </p:nvSpPr>
         <p:spPr>
           <a:xfrm>
-            <a:off x="457200" y="868680"/>
-            <a:ext cx="640080" cy="640080"/>
+            <a:off x="457200" y="651053"/>
+            <a:ext cx="640080" cy="480060"/>
           </a:xfrm>
           <a:prstGeom prst="rect">
             <a:avLst/>
@@ -3471,8 +3471,8 @@
         </p:nvSpPr>
         <p:spPr>
           <a:xfrm>
-            <a:off x="1280160" y="960120"/>
-            <a:ext cx="7406640" cy="457200"/>
+            <a:off x="1280160" y="720547"/>
+            <a:ext cx="7406640" cy="342900"/>
           </a:xfrm>
           <a:prstGeom prst="rect">
             <a:avLst/>
@@ -3510,8 +3510,8 @@
         </p:nvSpPr>
         <p:spPr>
           <a:xfrm>
-            <a:off x="457200" y="1691640"/>
-            <a:ext cx="4114800" cy="2286000"/>
+            <a:off x="457200" y="1269187"/>
+            <a:ext cx="4114800" cy="1714500"/>
           </a:xfrm>
           <a:prstGeom prst="rect">
             <a:avLst/>
@@ -3542,8 +3542,8 @@
         </p:nvSpPr>
         <p:spPr>
           <a:xfrm>
-            <a:off x="640080" y="1783080"/>
-            <a:ext cx="3749040" cy="2103120"/>
+            <a:off x="640080" y="1337767"/>
+            <a:ext cx="3749040" cy="1577340"/>
           </a:xfrm>
           <a:prstGeom prst="rect">
             <a:avLst/>
@@ -3700,8 +3700,8 @@
         </p:nvSpPr>
         <p:spPr>
           <a:xfrm>
-            <a:off x="4754880" y="1691640"/>
-            <a:ext cx="4114800" cy="1051560"/>
+            <a:off x="4754880" y="1269187"/>
+            <a:ext cx="4114800" cy="788213"/>
           </a:xfrm>
           <a:prstGeom prst="rect">
             <a:avLst/>
@@ -3732,8 +3732,8 @@
         </p:nvSpPr>
         <p:spPr>
           <a:xfrm>
-            <a:off x="4754880" y="1691640"/>
-            <a:ext cx="73152" cy="1051560"/>
+            <a:off x="4754880" y="1269187"/>
+            <a:ext cx="73152" cy="788213"/>
           </a:xfrm>
           <a:prstGeom prst="rect">
             <a:avLst/>
@@ -3757,8 +3757,8 @@
         </p:nvSpPr>
         <p:spPr>
           <a:xfrm>
-            <a:off x="4919472" y="1755648"/>
-            <a:ext cx="3794760" cy="274320"/>
+            <a:off x="4919472" y="1316736"/>
+            <a:ext cx="3794760" cy="205740"/>
           </a:xfrm>
           <a:prstGeom prst="rect">
             <a:avLst/>
@@ -3796,8 +3796,8 @@
         </p:nvSpPr>
         <p:spPr>
           <a:xfrm>
-            <a:off x="4919472" y="2084832"/>
-            <a:ext cx="3794760" cy="594360"/>
+            <a:off x="4919472" y="1563624"/>
+            <a:ext cx="3794760" cy="446227"/>
           </a:xfrm>
           <a:prstGeom prst="rect">
             <a:avLst/>
@@ -3835,8 +3835,8 @@
         </p:nvSpPr>
         <p:spPr>
           <a:xfrm>
-            <a:off x="4754880" y="2834640"/>
-            <a:ext cx="4114800" cy="1234440"/>
+            <a:off x="4754880" y="2125980"/>
+            <a:ext cx="4114800" cy="926287"/>
           </a:xfrm>
           <a:prstGeom prst="rect">
             <a:avLst/>
@@ -3867,8 +3867,8 @@
         </p:nvSpPr>
         <p:spPr>
           <a:xfrm>
-            <a:off x="4754880" y="2834640"/>
-            <a:ext cx="73152" cy="1234440"/>
+            <a:off x="4754880" y="2125980"/>
+            <a:ext cx="73152" cy="926287"/>
           </a:xfrm>
           <a:prstGeom prst="rect">
             <a:avLst/>
@@ -3892,8 +3892,8 @@
         </p:nvSpPr>
         <p:spPr>
           <a:xfrm>
-            <a:off x="4919472" y="2898648"/>
-            <a:ext cx="3794760" cy="274320"/>
+            <a:off x="4919472" y="2174443"/>
+            <a:ext cx="3794760" cy="205740"/>
           </a:xfrm>
           <a:prstGeom prst="rect">
             <a:avLst/>
@@ -3931,8 +3931,8 @@
         </p:nvSpPr>
         <p:spPr>
           <a:xfrm>
-            <a:off x="4919472" y="3227832"/>
-            <a:ext cx="3794760" cy="731520"/>
+            <a:off x="4919472" y="2421331"/>
+            <a:ext cx="3794760" cy="548640"/>
           </a:xfrm>
           <a:prstGeom prst="rect">
             <a:avLst/>
@@ -3970,8 +3970,8 @@
         </p:nvSpPr>
         <p:spPr>
           <a:xfrm>
-            <a:off x="457200" y="4663440"/>
-            <a:ext cx="2468880" cy="1005840"/>
+            <a:off x="457200" y="3497580"/>
+            <a:ext cx="2468880" cy="754380"/>
           </a:xfrm>
           <a:prstGeom prst="rect">
             <a:avLst/>
@@ -3997,8 +3997,8 @@
         </p:nvSpPr>
         <p:spPr>
           <a:xfrm>
-            <a:off x="566928" y="4718304"/>
-            <a:ext cx="2249424" cy="896112"/>
+            <a:off x="539496" y="3538728"/>
+            <a:ext cx="2249424" cy="672084"/>
           </a:xfrm>
           <a:prstGeom prst="rect">
             <a:avLst/>
@@ -4036,8 +4036,8 @@
         </p:nvSpPr>
         <p:spPr>
           <a:xfrm>
-            <a:off x="3108960" y="4663440"/>
-            <a:ext cx="2468880" cy="1005840"/>
+            <a:off x="3108960" y="3497580"/>
+            <a:ext cx="2468880" cy="754380"/>
           </a:xfrm>
           <a:prstGeom prst="rect">
             <a:avLst/>
@@ -4063,8 +4063,8 @@
         </p:nvSpPr>
         <p:spPr>
           <a:xfrm>
-            <a:off x="3218688" y="4718304"/>
-            <a:ext cx="2249424" cy="896112"/>
+            <a:off x="3191256" y="3538728"/>
+            <a:ext cx="2249424" cy="672084"/>
           </a:xfrm>
           <a:prstGeom prst="rect">
             <a:avLst/>
@@ -4102,8 +4102,8 @@
         </p:nvSpPr>
         <p:spPr>
           <a:xfrm>
-            <a:off x="5760720" y="4663440"/>
-            <a:ext cx="2468880" cy="1005840"/>
+            <a:off x="5760720" y="3497580"/>
+            <a:ext cx="2468880" cy="754380"/>
           </a:xfrm>
           <a:prstGeom prst="rect">
             <a:avLst/>
@@ -4129,8 +4129,8 @@
         </p:nvSpPr>
         <p:spPr>
           <a:xfrm>
-            <a:off x="5870448" y="4718304"/>
-            <a:ext cx="2249424" cy="896112"/>
+            <a:off x="5843016" y="3538728"/>
+            <a:ext cx="2249424" cy="672084"/>
           </a:xfrm>
           <a:prstGeom prst="rect">
             <a:avLst/>
@@ -4201,7 +4201,7 @@
         <p:spPr>
           <a:xfrm>
             <a:off x="0" y="0"/>
-            <a:ext cx="9144000" cy="640080"/>
+            <a:ext cx="9144000" cy="480060"/>
           </a:xfrm>
           <a:prstGeom prst="rect">
             <a:avLst/>
@@ -4226,7 +4226,7 @@
         <p:spPr>
           <a:xfrm>
             <a:off x="548640" y="0"/>
-            <a:ext cx="8229600" cy="640080"/>
+            <a:ext cx="8229600" cy="480060"/>
           </a:xfrm>
           <a:prstGeom prst="rect">
             <a:avLst/>
@@ -4264,8 +4264,8 @@
         </p:nvSpPr>
         <p:spPr>
           <a:xfrm>
-            <a:off x="457200" y="868680"/>
-            <a:ext cx="640080" cy="640080"/>
+            <a:off x="457200" y="651053"/>
+            <a:ext cx="640080" cy="480060"/>
           </a:xfrm>
           <a:prstGeom prst="ellipse">
             <a:avLst/>
@@ -4289,8 +4289,8 @@
         </p:nvSpPr>
         <p:spPr>
           <a:xfrm>
-            <a:off x="457200" y="868680"/>
-            <a:ext cx="640080" cy="640080"/>
+            <a:off x="457200" y="651053"/>
+            <a:ext cx="640080" cy="480060"/>
           </a:xfrm>
           <a:prstGeom prst="rect">
             <a:avLst/>
@@ -4328,8 +4328,8 @@
         </p:nvSpPr>
         <p:spPr>
           <a:xfrm>
-            <a:off x="1280160" y="960120"/>
-            <a:ext cx="7406640" cy="457200"/>
+            <a:off x="1280160" y="720547"/>
+            <a:ext cx="7406640" cy="342900"/>
           </a:xfrm>
           <a:prstGeom prst="rect">
             <a:avLst/>
@@ -4367,8 +4367,8 @@
         </p:nvSpPr>
         <p:spPr>
           <a:xfrm>
-            <a:off x="365760" y="1691640"/>
-            <a:ext cx="3931920" cy="2194560"/>
+            <a:off x="365760" y="1269187"/>
+            <a:ext cx="3931920" cy="1645920"/>
           </a:xfrm>
           <a:prstGeom prst="rect">
             <a:avLst/>
@@ -4392,8 +4392,8 @@
         </p:nvSpPr>
         <p:spPr>
           <a:xfrm>
-            <a:off x="548640" y="1801368"/>
-            <a:ext cx="3566160" cy="274320"/>
+            <a:off x="548640" y="1351483"/>
+            <a:ext cx="3566160" cy="205740"/>
           </a:xfrm>
           <a:prstGeom prst="rect">
             <a:avLst/>
@@ -4431,8 +4431,8 @@
         </p:nvSpPr>
         <p:spPr>
           <a:xfrm>
-            <a:off x="548640" y="2148840"/>
-            <a:ext cx="3566160" cy="1600200"/>
+            <a:off x="548640" y="1612087"/>
+            <a:ext cx="3566160" cy="1200607"/>
           </a:xfrm>
           <a:prstGeom prst="rect">
             <a:avLst/>
@@ -4470,8 +4470,8 @@
         </p:nvSpPr>
         <p:spPr>
           <a:xfrm>
-            <a:off x="4370832" y="2377440"/>
-            <a:ext cx="457200" cy="457200"/>
+            <a:off x="4370832" y="1783080"/>
+            <a:ext cx="457200" cy="342900"/>
           </a:xfrm>
           <a:prstGeom prst="rect">
             <a:avLst/>
@@ -4509,8 +4509,8 @@
         </p:nvSpPr>
         <p:spPr>
           <a:xfrm>
-            <a:off x="4754880" y="1691640"/>
-            <a:ext cx="3931920" cy="2194560"/>
+            <a:off x="4754880" y="1269187"/>
+            <a:ext cx="3931920" cy="1645920"/>
           </a:xfrm>
           <a:prstGeom prst="rect">
             <a:avLst/>
@@ -4536,8 +4536,8 @@
         </p:nvSpPr>
         <p:spPr>
           <a:xfrm>
-            <a:off x="4937760" y="1801368"/>
-            <a:ext cx="3566160" cy="274320"/>
+            <a:off x="4937760" y="1351483"/>
+            <a:ext cx="3566160" cy="205740"/>
           </a:xfrm>
           <a:prstGeom prst="rect">
             <a:avLst/>
@@ -4575,8 +4575,8 @@
         </p:nvSpPr>
         <p:spPr>
           <a:xfrm>
-            <a:off x="4937760" y="2148840"/>
-            <a:ext cx="3566160" cy="1600200"/>
+            <a:off x="4937760" y="1612087"/>
+            <a:ext cx="3566160" cy="1200607"/>
           </a:xfrm>
           <a:prstGeom prst="rect">
             <a:avLst/>
@@ -4669,8 +4669,8 @@
         </p:nvSpPr>
         <p:spPr>
           <a:xfrm>
-            <a:off x="457200" y="4114800"/>
-            <a:ext cx="8229600" cy="365760"/>
+            <a:off x="457200" y="3086100"/>
+            <a:ext cx="8229600" cy="274320"/>
           </a:xfrm>
           <a:prstGeom prst="rect">
             <a:avLst/>
@@ -4708,12 +4708,12 @@
         </p:nvSpPr>
         <p:spPr>
           <a:xfrm>
-            <a:off x="457200" y="4617720"/>
-            <a:ext cx="2286000" cy="347472"/>
+            <a:off x="457200" y="3462833"/>
+            <a:ext cx="2286000" cy="260604"/>
           </a:xfrm>
           <a:prstGeom prst="roundRect">
             <a:avLst>
-              <a:gd name="adj" fmla="val 26316"/>
+              <a:gd name="adj" fmla="val 35088"/>
             </a:avLst>
           </a:prstGeom>
           <a:solidFill>
@@ -4735,8 +4735,8 @@
         </p:nvSpPr>
         <p:spPr>
           <a:xfrm>
-            <a:off x="457200" y="4617720"/>
-            <a:ext cx="2286000" cy="347472"/>
+            <a:off x="457200" y="3462833"/>
+            <a:ext cx="2286000" cy="260604"/>
           </a:xfrm>
           <a:prstGeom prst="rect">
             <a:avLst/>
@@ -4774,12 +4774,12 @@
         </p:nvSpPr>
         <p:spPr>
           <a:xfrm>
-            <a:off x="3017520" y="4617720"/>
-            <a:ext cx="2286000" cy="347472"/>
+            <a:off x="3017520" y="3462833"/>
+            <a:ext cx="2286000" cy="260604"/>
           </a:xfrm>
           <a:prstGeom prst="roundRect">
             <a:avLst>
-              <a:gd name="adj" fmla="val 26316"/>
+              <a:gd name="adj" fmla="val 35088"/>
             </a:avLst>
           </a:prstGeom>
           <a:solidFill>
@@ -4801,8 +4801,8 @@
         </p:nvSpPr>
         <p:spPr>
           <a:xfrm>
-            <a:off x="3017520" y="4617720"/>
-            <a:ext cx="2286000" cy="347472"/>
+            <a:off x="3017520" y="3462833"/>
+            <a:ext cx="2286000" cy="260604"/>
           </a:xfrm>
           <a:prstGeom prst="rect">
             <a:avLst/>
@@ -4840,12 +4840,12 @@
         </p:nvSpPr>
         <p:spPr>
           <a:xfrm>
-            <a:off x="5577840" y="4617720"/>
-            <a:ext cx="2697480" cy="347472"/>
+            <a:off x="5577840" y="3462833"/>
+            <a:ext cx="2697480" cy="260604"/>
           </a:xfrm>
           <a:prstGeom prst="roundRect">
             <a:avLst>
-              <a:gd name="adj" fmla="val 26316"/>
+              <a:gd name="adj" fmla="val 35088"/>
             </a:avLst>
           </a:prstGeom>
           <a:solidFill>
@@ -4867,8 +4867,8 @@
         </p:nvSpPr>
         <p:spPr>
           <a:xfrm>
-            <a:off x="5577840" y="4617720"/>
-            <a:ext cx="2697480" cy="347472"/>
+            <a:off x="5577840" y="3462833"/>
+            <a:ext cx="2697480" cy="260604"/>
           </a:xfrm>
           <a:prstGeom prst="rect">
             <a:avLst/>
@@ -4938,8 +4938,8 @@
         </p:nvSpPr>
         <p:spPr>
           <a:xfrm>
-            <a:off x="548640" y="228600"/>
-            <a:ext cx="8229600" cy="548640"/>
+            <a:off x="548640" y="171907"/>
+            <a:ext cx="8229600" cy="411480"/>
           </a:xfrm>
           <a:prstGeom prst="rect">
             <a:avLst/>
@@ -4977,8 +4977,8 @@
         </p:nvSpPr>
         <p:spPr>
           <a:xfrm>
-            <a:off x="548640" y="777240"/>
-            <a:ext cx="8229600" cy="365760"/>
+            <a:off x="548640" y="583387"/>
+            <a:ext cx="8229600" cy="274320"/>
           </a:xfrm>
           <a:prstGeom prst="rect">
             <a:avLst/>
@@ -5016,8 +5016,8 @@
         </p:nvSpPr>
         <p:spPr>
           <a:xfrm>
-            <a:off x="411480" y="1280160"/>
-            <a:ext cx="3931920" cy="2286000"/>
+            <a:off x="411480" y="960120"/>
+            <a:ext cx="3931920" cy="1714500"/>
           </a:xfrm>
           <a:prstGeom prst="rect">
             <a:avLst/>
@@ -5048,8 +5048,8 @@
         </p:nvSpPr>
         <p:spPr>
           <a:xfrm>
-            <a:off x="411480" y="1280160"/>
-            <a:ext cx="3931920" cy="73152"/>
+            <a:off x="411480" y="960120"/>
+            <a:ext cx="3931920" cy="54864"/>
           </a:xfrm>
           <a:prstGeom prst="rect">
             <a:avLst/>
@@ -5073,8 +5073,8 @@
         </p:nvSpPr>
         <p:spPr>
           <a:xfrm>
-            <a:off x="548640" y="1426464"/>
-            <a:ext cx="3657600" cy="320040"/>
+            <a:off x="513893" y="1069848"/>
+            <a:ext cx="3657600" cy="239573"/>
           </a:xfrm>
           <a:prstGeom prst="rect">
             <a:avLst/>
@@ -5112,8 +5112,8 @@
         </p:nvSpPr>
         <p:spPr>
           <a:xfrm>
-            <a:off x="548640" y="1792224"/>
-            <a:ext cx="3657600" cy="1097280"/>
+            <a:off x="513893" y="1344168"/>
+            <a:ext cx="3657600" cy="822960"/>
           </a:xfrm>
           <a:prstGeom prst="rect">
             <a:avLst/>
@@ -5151,12 +5151,12 @@
         </p:nvSpPr>
         <p:spPr>
           <a:xfrm>
-            <a:off x="548640" y="3090672"/>
-            <a:ext cx="2560320" cy="274320"/>
+            <a:off x="513893" y="2318004"/>
+            <a:ext cx="2560320" cy="205740"/>
           </a:xfrm>
           <a:prstGeom prst="roundRect">
             <a:avLst>
-              <a:gd name="adj" fmla="val 33333"/>
+              <a:gd name="adj" fmla="val 44444"/>
             </a:avLst>
           </a:prstGeom>
           <a:solidFill>
@@ -5178,8 +5178,8 @@
         </p:nvSpPr>
         <p:spPr>
           <a:xfrm>
-            <a:off x="548640" y="3090672"/>
-            <a:ext cx="2560320" cy="274320"/>
+            <a:off x="513893" y="2318004"/>
+            <a:ext cx="2560320" cy="205740"/>
           </a:xfrm>
           <a:prstGeom prst="rect">
             <a:avLst/>
@@ -5217,8 +5217,8 @@
         </p:nvSpPr>
         <p:spPr>
           <a:xfrm>
-            <a:off x="4800600" y="1280160"/>
-            <a:ext cx="3931920" cy="2286000"/>
+            <a:off x="4800600" y="960120"/>
+            <a:ext cx="3931920" cy="1714500"/>
           </a:xfrm>
           <a:prstGeom prst="rect">
             <a:avLst/>
@@ -5249,8 +5249,8 @@
         </p:nvSpPr>
         <p:spPr>
           <a:xfrm>
-            <a:off x="4800600" y="1280160"/>
-            <a:ext cx="3931920" cy="73152"/>
+            <a:off x="4800600" y="960120"/>
+            <a:ext cx="3931920" cy="54864"/>
           </a:xfrm>
           <a:prstGeom prst="rect">
             <a:avLst/>
@@ -5274,8 +5274,8 @@
         </p:nvSpPr>
         <p:spPr>
           <a:xfrm>
-            <a:off x="4937760" y="1426464"/>
-            <a:ext cx="3657600" cy="320040"/>
+            <a:off x="4903013" y="1069848"/>
+            <a:ext cx="3657600" cy="239573"/>
           </a:xfrm>
           <a:prstGeom prst="rect">
             <a:avLst/>
@@ -5313,8 +5313,8 @@
         </p:nvSpPr>
         <p:spPr>
           <a:xfrm>
-            <a:off x="4937760" y="1792224"/>
-            <a:ext cx="3657600" cy="1097280"/>
+            <a:off x="4903013" y="1344168"/>
+            <a:ext cx="3657600" cy="822960"/>
           </a:xfrm>
           <a:prstGeom prst="rect">
             <a:avLst/>
@@ -5352,12 +5352,12 @@
         </p:nvSpPr>
         <p:spPr>
           <a:xfrm>
-            <a:off x="4937760" y="3090672"/>
-            <a:ext cx="2560320" cy="274320"/>
+            <a:off x="4903013" y="2318004"/>
+            <a:ext cx="2560320" cy="205740"/>
           </a:xfrm>
           <a:prstGeom prst="roundRect">
             <a:avLst>
-              <a:gd name="adj" fmla="val 33333"/>
+              <a:gd name="adj" fmla="val 44444"/>
             </a:avLst>
           </a:prstGeom>
           <a:solidFill>
@@ -5379,8 +5379,8 @@
         </p:nvSpPr>
         <p:spPr>
           <a:xfrm>
-            <a:off x="4937760" y="3090672"/>
-            <a:ext cx="2560320" cy="274320"/>
+            <a:off x="4903013" y="2318004"/>
+            <a:ext cx="2560320" cy="205740"/>
           </a:xfrm>
           <a:prstGeom prst="rect">
             <a:avLst/>
@@ -5418,8 +5418,8 @@
         </p:nvSpPr>
         <p:spPr>
           <a:xfrm>
-            <a:off x="411480" y="3749040"/>
-            <a:ext cx="3931920" cy="2286000"/>
+            <a:off x="411480" y="2811780"/>
+            <a:ext cx="3931920" cy="1714500"/>
           </a:xfrm>
           <a:prstGeom prst="rect">
             <a:avLst/>
@@ -5450,8 +5450,8 @@
         </p:nvSpPr>
         <p:spPr>
           <a:xfrm>
-            <a:off x="411480" y="3749040"/>
-            <a:ext cx="3931920" cy="73152"/>
+            <a:off x="411480" y="2811780"/>
+            <a:ext cx="3931920" cy="54864"/>
           </a:xfrm>
           <a:prstGeom prst="rect">
             <a:avLst/>
@@ -5475,8 +5475,8 @@
         </p:nvSpPr>
         <p:spPr>
           <a:xfrm>
-            <a:off x="548640" y="3895344"/>
-            <a:ext cx="3657600" cy="320040"/>
+            <a:off x="513893" y="2921508"/>
+            <a:ext cx="3657600" cy="239573"/>
           </a:xfrm>
           <a:prstGeom prst="rect">
             <a:avLst/>
@@ -5514,8 +5514,8 @@
         </p:nvSpPr>
         <p:spPr>
           <a:xfrm>
-            <a:off x="548640" y="4261104"/>
-            <a:ext cx="3657600" cy="1097280"/>
+            <a:off x="513893" y="3195828"/>
+            <a:ext cx="3657600" cy="822960"/>
           </a:xfrm>
           <a:prstGeom prst="rect">
             <a:avLst/>
@@ -5553,12 +5553,12 @@
         </p:nvSpPr>
         <p:spPr>
           <a:xfrm>
-            <a:off x="548640" y="5559552"/>
-            <a:ext cx="2560320" cy="274320"/>
+            <a:off x="513893" y="4169664"/>
+            <a:ext cx="2560320" cy="205740"/>
           </a:xfrm>
           <a:prstGeom prst="roundRect">
             <a:avLst>
-              <a:gd name="adj" fmla="val 33333"/>
+              <a:gd name="adj" fmla="val 44444"/>
             </a:avLst>
           </a:prstGeom>
           <a:solidFill>
@@ -5580,8 +5580,8 @@
         </p:nvSpPr>
         <p:spPr>
           <a:xfrm>
-            <a:off x="548640" y="5559552"/>
-            <a:ext cx="2560320" cy="274320"/>
+            <a:off x="513893" y="4169664"/>
+            <a:ext cx="2560320" cy="205740"/>
           </a:xfrm>
           <a:prstGeom prst="rect">
             <a:avLst/>
@@ -5619,8 +5619,8 @@
         </p:nvSpPr>
         <p:spPr>
           <a:xfrm>
-            <a:off x="4800600" y="3749040"/>
-            <a:ext cx="3931920" cy="2286000"/>
+            <a:off x="4800600" y="2811780"/>
+            <a:ext cx="3931920" cy="1714500"/>
           </a:xfrm>
           <a:prstGeom prst="rect">
             <a:avLst/>
@@ -5651,8 +5651,8 @@
         </p:nvSpPr>
         <p:spPr>
           <a:xfrm>
-            <a:off x="4800600" y="3749040"/>
-            <a:ext cx="3931920" cy="73152"/>
+            <a:off x="4800600" y="2811780"/>
+            <a:ext cx="3931920" cy="54864"/>
           </a:xfrm>
           <a:prstGeom prst="rect">
             <a:avLst/>
@@ -5676,8 +5676,8 @@
         </p:nvSpPr>
         <p:spPr>
           <a:xfrm>
-            <a:off x="4937760" y="3895344"/>
-            <a:ext cx="3657600" cy="320040"/>
+            <a:off x="4903013" y="2921508"/>
+            <a:ext cx="3657600" cy="239573"/>
           </a:xfrm>
           <a:prstGeom prst="rect">
             <a:avLst/>
@@ -5715,8 +5715,8 @@
         </p:nvSpPr>
         <p:spPr>
           <a:xfrm>
-            <a:off x="4937760" y="4261104"/>
-            <a:ext cx="3657600" cy="1097280"/>
+            <a:off x="4903013" y="3195828"/>
+            <a:ext cx="3657600" cy="822960"/>
           </a:xfrm>
           <a:prstGeom prst="rect">
             <a:avLst/>
@@ -5754,12 +5754,12 @@
         </p:nvSpPr>
         <p:spPr>
           <a:xfrm>
-            <a:off x="4937760" y="5559552"/>
-            <a:ext cx="2560320" cy="274320"/>
+            <a:off x="4903013" y="4169664"/>
+            <a:ext cx="2560320" cy="205740"/>
           </a:xfrm>
           <a:prstGeom prst="roundRect">
             <a:avLst>
-              <a:gd name="adj" fmla="val 33333"/>
+              <a:gd name="adj" fmla="val 44444"/>
             </a:avLst>
           </a:prstGeom>
           <a:solidFill>
@@ -5781,8 +5781,8 @@
         </p:nvSpPr>
         <p:spPr>
           <a:xfrm>
-            <a:off x="4937760" y="5559552"/>
-            <a:ext cx="2560320" cy="274320"/>
+            <a:off x="4903013" y="4169664"/>
+            <a:ext cx="2560320" cy="205740"/>
           </a:xfrm>
           <a:prstGeom prst="rect">
             <a:avLst/>
@@ -5853,7 +5853,7 @@
         <p:spPr>
           <a:xfrm>
             <a:off x="0" y="0"/>
-            <a:ext cx="9144000" cy="640080"/>
+            <a:ext cx="9144000" cy="480060"/>
           </a:xfrm>
           <a:prstGeom prst="rect">
             <a:avLst/>
@@ -5878,7 +5878,7 @@
         <p:spPr>
           <a:xfrm>
             <a:off x="548640" y="0"/>
-            <a:ext cx="8229600" cy="640080"/>
+            <a:ext cx="8229600" cy="480060"/>
           </a:xfrm>
           <a:prstGeom prst="rect">
             <a:avLst/>
@@ -5916,8 +5916,8 @@
         </p:nvSpPr>
         <p:spPr>
           <a:xfrm>
-            <a:off x="457200" y="685800"/>
-            <a:ext cx="8229600" cy="320040"/>
+            <a:off x="457200" y="514807"/>
+            <a:ext cx="8229600" cy="239573"/>
           </a:xfrm>
           <a:prstGeom prst="rect">
             <a:avLst/>
@@ -5955,8 +5955,8 @@
         </p:nvSpPr>
         <p:spPr>
           <a:xfrm>
-            <a:off x="411480" y="1051560"/>
-            <a:ext cx="2651760" cy="3840480"/>
+            <a:off x="411480" y="788213"/>
+            <a:ext cx="2651760" cy="2880360"/>
           </a:xfrm>
           <a:prstGeom prst="rect">
             <a:avLst/>
@@ -5987,8 +5987,8 @@
         </p:nvSpPr>
         <p:spPr>
           <a:xfrm>
-            <a:off x="822960" y="1188720"/>
-            <a:ext cx="731520" cy="731520"/>
+            <a:off x="822960" y="891540"/>
+            <a:ext cx="731520" cy="548640"/>
           </a:xfrm>
           <a:prstGeom prst="ellipse">
             <a:avLst/>
@@ -6012,8 +6012,8 @@
         </p:nvSpPr>
         <p:spPr>
           <a:xfrm>
-            <a:off x="822960" y="1188720"/>
-            <a:ext cx="731520" cy="731520"/>
+            <a:off x="822960" y="891540"/>
+            <a:ext cx="731520" cy="548640"/>
           </a:xfrm>
           <a:prstGeom prst="rect">
             <a:avLst/>
@@ -6051,8 +6051,8 @@
         </p:nvSpPr>
         <p:spPr>
           <a:xfrm>
-            <a:off x="502920" y="2057400"/>
-            <a:ext cx="2468880" cy="411480"/>
+            <a:off x="480060" y="1543507"/>
+            <a:ext cx="2468880" cy="309067"/>
           </a:xfrm>
           <a:prstGeom prst="rect">
             <a:avLst/>
@@ -6090,8 +6090,8 @@
         </p:nvSpPr>
         <p:spPr>
           <a:xfrm>
-            <a:off x="411480" y="2514600"/>
-            <a:ext cx="2651760" cy="45720"/>
+            <a:off x="411480" y="1886407"/>
+            <a:ext cx="2651760" cy="34747"/>
           </a:xfrm>
           <a:prstGeom prst="rect">
             <a:avLst/>
@@ -6115,8 +6115,8 @@
         </p:nvSpPr>
         <p:spPr>
           <a:xfrm>
-            <a:off x="502920" y="2606040"/>
-            <a:ext cx="2468880" cy="1645920"/>
+            <a:off x="480060" y="1954987"/>
+            <a:ext cx="2468880" cy="1234440"/>
           </a:xfrm>
           <a:prstGeom prst="rect">
             <a:avLst/>
@@ -6209,12 +6209,12 @@
         </p:nvSpPr>
         <p:spPr>
           <a:xfrm>
-            <a:off x="502920" y="4498848"/>
-            <a:ext cx="2468880" cy="274320"/>
+            <a:off x="480060" y="3374136"/>
+            <a:ext cx="2468880" cy="205740"/>
           </a:xfrm>
           <a:prstGeom prst="roundRect">
             <a:avLst>
-              <a:gd name="adj" fmla="val 33333"/>
+              <a:gd name="adj" fmla="val 44444"/>
             </a:avLst>
           </a:prstGeom>
           <a:solidFill>
@@ -6236,8 +6236,8 @@
         </p:nvSpPr>
         <p:spPr>
           <a:xfrm>
-            <a:off x="502920" y="4498848"/>
-            <a:ext cx="2468880" cy="274320"/>
+            <a:off x="480060" y="3374136"/>
+            <a:ext cx="2468880" cy="205740"/>
           </a:xfrm>
           <a:prstGeom prst="rect">
             <a:avLst/>
@@ -6275,8 +6275,8 @@
         </p:nvSpPr>
         <p:spPr>
           <a:xfrm>
-            <a:off x="3246120" y="1051560"/>
-            <a:ext cx="2651760" cy="3840480"/>
+            <a:off x="3246120" y="788213"/>
+            <a:ext cx="2651760" cy="2880360"/>
           </a:xfrm>
           <a:prstGeom prst="rect">
             <a:avLst/>
@@ -6307,8 +6307,8 @@
         </p:nvSpPr>
         <p:spPr>
           <a:xfrm>
-            <a:off x="3657600" y="1188720"/>
-            <a:ext cx="731520" cy="731520"/>
+            <a:off x="3657600" y="891540"/>
+            <a:ext cx="731520" cy="548640"/>
           </a:xfrm>
           <a:prstGeom prst="ellipse">
             <a:avLst/>
@@ -6332,8 +6332,8 @@
         </p:nvSpPr>
         <p:spPr>
           <a:xfrm>
-            <a:off x="3657600" y="1188720"/>
-            <a:ext cx="731520" cy="731520"/>
+            <a:off x="3657600" y="891540"/>
+            <a:ext cx="731520" cy="548640"/>
           </a:xfrm>
           <a:prstGeom prst="rect">
             <a:avLst/>
@@ -6371,8 +6371,8 @@
         </p:nvSpPr>
         <p:spPr>
           <a:xfrm>
-            <a:off x="3337560" y="2057400"/>
-            <a:ext cx="2468880" cy="411480"/>
+            <a:off x="3314700" y="1543507"/>
+            <a:ext cx="2468880" cy="309067"/>
           </a:xfrm>
           <a:prstGeom prst="rect">
             <a:avLst/>
@@ -6410,8 +6410,8 @@
         </p:nvSpPr>
         <p:spPr>
           <a:xfrm>
-            <a:off x="3246120" y="2514600"/>
-            <a:ext cx="2651760" cy="45720"/>
+            <a:off x="3246120" y="1886407"/>
+            <a:ext cx="2651760" cy="34747"/>
           </a:xfrm>
           <a:prstGeom prst="rect">
             <a:avLst/>
@@ -6435,8 +6435,8 @@
         </p:nvSpPr>
         <p:spPr>
           <a:xfrm>
-            <a:off x="3337560" y="2606040"/>
-            <a:ext cx="2468880" cy="1645920"/>
+            <a:off x="3314700" y="1954987"/>
+            <a:ext cx="2468880" cy="1234440"/>
           </a:xfrm>
           <a:prstGeom prst="rect">
             <a:avLst/>
@@ -6529,12 +6529,12 @@
         </p:nvSpPr>
         <p:spPr>
           <a:xfrm>
-            <a:off x="3337560" y="4498848"/>
-            <a:ext cx="2468880" cy="274320"/>
+            <a:off x="3314700" y="3374136"/>
+            <a:ext cx="2468880" cy="205740"/>
           </a:xfrm>
           <a:prstGeom prst="roundRect">
             <a:avLst>
-              <a:gd name="adj" fmla="val 33333"/>
+              <a:gd name="adj" fmla="val 44444"/>
             </a:avLst>
           </a:prstGeom>
           <a:solidFill>
@@ -6556,8 +6556,8 @@
         </p:nvSpPr>
         <p:spPr>
           <a:xfrm>
-            <a:off x="3337560" y="4498848"/>
-            <a:ext cx="2468880" cy="274320"/>
+            <a:off x="3314700" y="3374136"/>
+            <a:ext cx="2468880" cy="205740"/>
           </a:xfrm>
           <a:prstGeom prst="rect">
             <a:avLst/>
@@ -6595,8 +6595,8 @@
         </p:nvSpPr>
         <p:spPr>
           <a:xfrm>
-            <a:off x="6080760" y="1051560"/>
-            <a:ext cx="2651760" cy="3840480"/>
+            <a:off x="6080760" y="788213"/>
+            <a:ext cx="2651760" cy="2880360"/>
           </a:xfrm>
           <a:prstGeom prst="rect">
             <a:avLst/>
@@ -6627,8 +6627,8 @@
         </p:nvSpPr>
         <p:spPr>
           <a:xfrm>
-            <a:off x="6492240" y="1188720"/>
-            <a:ext cx="731520" cy="731520"/>
+            <a:off x="6492240" y="891540"/>
+            <a:ext cx="731520" cy="548640"/>
           </a:xfrm>
           <a:prstGeom prst="ellipse">
             <a:avLst/>
@@ -6652,8 +6652,8 @@
         </p:nvSpPr>
         <p:spPr>
           <a:xfrm>
-            <a:off x="6492240" y="1188720"/>
-            <a:ext cx="731520" cy="731520"/>
+            <a:off x="6492240" y="891540"/>
+            <a:ext cx="731520" cy="548640"/>
           </a:xfrm>
           <a:prstGeom prst="rect">
             <a:avLst/>
@@ -6691,8 +6691,8 @@
         </p:nvSpPr>
         <p:spPr>
           <a:xfrm>
-            <a:off x="6172200" y="2057400"/>
-            <a:ext cx="2468880" cy="411480"/>
+            <a:off x="6149340" y="1543507"/>
+            <a:ext cx="2468880" cy="309067"/>
           </a:xfrm>
           <a:prstGeom prst="rect">
             <a:avLst/>
@@ -6730,8 +6730,8 @@
         </p:nvSpPr>
         <p:spPr>
           <a:xfrm>
-            <a:off x="6080760" y="2514600"/>
-            <a:ext cx="2651760" cy="45720"/>
+            <a:off x="6080760" y="1886407"/>
+            <a:ext cx="2651760" cy="34747"/>
           </a:xfrm>
           <a:prstGeom prst="rect">
             <a:avLst/>
@@ -6755,8 +6755,8 @@
         </p:nvSpPr>
         <p:spPr>
           <a:xfrm>
-            <a:off x="6172200" y="2606040"/>
-            <a:ext cx="2468880" cy="1645920"/>
+            <a:off x="6149340" y="1954987"/>
+            <a:ext cx="2468880" cy="1234440"/>
           </a:xfrm>
           <a:prstGeom prst="rect">
             <a:avLst/>
@@ -6849,12 +6849,12 @@
         </p:nvSpPr>
         <p:spPr>
           <a:xfrm>
-            <a:off x="6172200" y="4498848"/>
-            <a:ext cx="2468880" cy="274320"/>
+            <a:off x="6149340" y="3374136"/>
+            <a:ext cx="2468880" cy="205740"/>
           </a:xfrm>
           <a:prstGeom prst="roundRect">
             <a:avLst>
-              <a:gd name="adj" fmla="val 33333"/>
+              <a:gd name="adj" fmla="val 44444"/>
             </a:avLst>
           </a:prstGeom>
           <a:solidFill>
@@ -6876,8 +6876,8 @@
         </p:nvSpPr>
         <p:spPr>
           <a:xfrm>
-            <a:off x="6172200" y="4498848"/>
-            <a:ext cx="2468880" cy="274320"/>
+            <a:off x="6149340" y="3374136"/>
+            <a:ext cx="2468880" cy="205740"/>
           </a:xfrm>
           <a:prstGeom prst="rect">
             <a:avLst/>
@@ -6947,8 +6947,8 @@
         </p:nvSpPr>
         <p:spPr>
           <a:xfrm>
-            <a:off x="548640" y="274320"/>
-            <a:ext cx="8229600" cy="594360"/>
+            <a:off x="548640" y="205740"/>
+            <a:ext cx="8229600" cy="446227"/>
           </a:xfrm>
           <a:prstGeom prst="rect">
             <a:avLst/>
@@ -6986,8 +6986,8 @@
         </p:nvSpPr>
         <p:spPr>
           <a:xfrm>
-            <a:off x="548640" y="960120"/>
-            <a:ext cx="8229600" cy="365760"/>
+            <a:off x="548640" y="720547"/>
+            <a:ext cx="8229600" cy="274320"/>
           </a:xfrm>
           <a:prstGeom prst="rect">
             <a:avLst/>
@@ -7025,8 +7025,8 @@
         </p:nvSpPr>
         <p:spPr>
           <a:xfrm>
-            <a:off x="457200" y="1417320"/>
-            <a:ext cx="4114800" cy="1234440"/>
+            <a:off x="457200" y="797357"/>
+            <a:ext cx="4114800" cy="926287"/>
           </a:xfrm>
           <a:prstGeom prst="rect">
             <a:avLst/>
@@ -7052,8 +7052,8 @@
         </p:nvSpPr>
         <p:spPr>
           <a:xfrm>
-            <a:off x="640080" y="1554480"/>
-            <a:ext cx="3749040" cy="502920"/>
+            <a:off x="640080" y="899770"/>
+            <a:ext cx="3749040" cy="377647"/>
           </a:xfrm>
           <a:prstGeom prst="rect">
             <a:avLst/>
@@ -7091,8 +7091,8 @@
         </p:nvSpPr>
         <p:spPr>
           <a:xfrm>
-            <a:off x="640080" y="2103120"/>
-            <a:ext cx="3749040" cy="411480"/>
+            <a:off x="640080" y="1312164"/>
+            <a:ext cx="3749040" cy="309067"/>
           </a:xfrm>
           <a:prstGeom prst="rect">
             <a:avLst/>
@@ -7130,8 +7130,8 @@
         </p:nvSpPr>
         <p:spPr>
           <a:xfrm>
-            <a:off x="457200" y="2880360"/>
-            <a:ext cx="4114800" cy="1234440"/>
+            <a:off x="457200" y="1620317"/>
+            <a:ext cx="4114800" cy="926287"/>
           </a:xfrm>
           <a:prstGeom prst="rect">
             <a:avLst/>
@@ -7157,8 +7157,8 @@
         </p:nvSpPr>
         <p:spPr>
           <a:xfrm>
-            <a:off x="640080" y="3017520"/>
-            <a:ext cx="3749040" cy="502920"/>
+            <a:off x="640080" y="1722730"/>
+            <a:ext cx="3749040" cy="377647"/>
           </a:xfrm>
           <a:prstGeom prst="rect">
             <a:avLst/>
@@ -7196,8 +7196,8 @@
         </p:nvSpPr>
         <p:spPr>
           <a:xfrm>
-            <a:off x="640080" y="3566160"/>
-            <a:ext cx="3749040" cy="411480"/>
+            <a:off x="640080" y="2135124"/>
+            <a:ext cx="3749040" cy="309067"/>
           </a:xfrm>
           <a:prstGeom prst="rect">
             <a:avLst/>
@@ -7235,8 +7235,8 @@
         </p:nvSpPr>
         <p:spPr>
           <a:xfrm>
-            <a:off x="457200" y="4343400"/>
-            <a:ext cx="4114800" cy="1234440"/>
+            <a:off x="457200" y="2443277"/>
+            <a:ext cx="4114800" cy="926287"/>
           </a:xfrm>
           <a:prstGeom prst="rect">
             <a:avLst/>
@@ -7262,8 +7262,8 @@
         </p:nvSpPr>
         <p:spPr>
           <a:xfrm>
-            <a:off x="640080" y="4480560"/>
-            <a:ext cx="3749040" cy="502920"/>
+            <a:off x="640080" y="2545690"/>
+            <a:ext cx="3749040" cy="377647"/>
           </a:xfrm>
           <a:prstGeom prst="rect">
             <a:avLst/>
@@ -7301,8 +7301,8 @@
         </p:nvSpPr>
         <p:spPr>
           <a:xfrm>
-            <a:off x="640080" y="5029200"/>
-            <a:ext cx="3749040" cy="411480"/>
+            <a:off x="640080" y="2958084"/>
+            <a:ext cx="3749040" cy="309067"/>
           </a:xfrm>
           <a:prstGeom prst="rect">
             <a:avLst/>
@@ -7340,8 +7340,8 @@
         </p:nvSpPr>
         <p:spPr>
           <a:xfrm>
-            <a:off x="4846320" y="1417320"/>
-            <a:ext cx="3840480" cy="365760"/>
+            <a:off x="4846320" y="1063447"/>
+            <a:ext cx="3840480" cy="274320"/>
           </a:xfrm>
           <a:prstGeom prst="rect">
             <a:avLst/>
@@ -7379,8 +7379,8 @@
         </p:nvSpPr>
         <p:spPr>
           <a:xfrm>
-            <a:off x="4846320" y="1920240"/>
-            <a:ext cx="411480" cy="411480"/>
+            <a:off x="4846320" y="1079906"/>
+            <a:ext cx="411480" cy="309067"/>
           </a:xfrm>
           <a:prstGeom prst="ellipse">
             <a:avLst/>
@@ -7404,8 +7404,8 @@
         </p:nvSpPr>
         <p:spPr>
           <a:xfrm>
-            <a:off x="4846320" y="1920240"/>
-            <a:ext cx="411480" cy="411480"/>
+            <a:off x="4846320" y="1079906"/>
+            <a:ext cx="411480" cy="309067"/>
           </a:xfrm>
           <a:prstGeom prst="rect">
             <a:avLst/>
@@ -7443,8 +7443,8 @@
         </p:nvSpPr>
         <p:spPr>
           <a:xfrm>
-            <a:off x="5376672" y="1920240"/>
-            <a:ext cx="3291840" cy="274320"/>
+            <a:off x="5376672" y="1079906"/>
+            <a:ext cx="3291840" cy="205740"/>
           </a:xfrm>
           <a:prstGeom prst="rect">
             <a:avLst/>
@@ -7482,8 +7482,8 @@
         </p:nvSpPr>
         <p:spPr>
           <a:xfrm>
-            <a:off x="5376672" y="2221992"/>
-            <a:ext cx="3291840" cy="457200"/>
+            <a:off x="5376672" y="1306678"/>
+            <a:ext cx="3291840" cy="342900"/>
           </a:xfrm>
           <a:prstGeom prst="rect">
             <a:avLst/>
@@ -7521,8 +7521,8 @@
         </p:nvSpPr>
         <p:spPr>
           <a:xfrm>
-            <a:off x="4846320" y="2926080"/>
-            <a:ext cx="411480" cy="411480"/>
+            <a:off x="4846320" y="1645920"/>
+            <a:ext cx="411480" cy="309067"/>
           </a:xfrm>
           <a:prstGeom prst="ellipse">
             <a:avLst/>
@@ -7546,8 +7546,8 @@
         </p:nvSpPr>
         <p:spPr>
           <a:xfrm>
-            <a:off x="4846320" y="2926080"/>
-            <a:ext cx="411480" cy="411480"/>
+            <a:off x="4846320" y="1645920"/>
+            <a:ext cx="411480" cy="309067"/>
           </a:xfrm>
           <a:prstGeom prst="rect">
             <a:avLst/>
@@ -7585,8 +7585,8 @@
         </p:nvSpPr>
         <p:spPr>
           <a:xfrm>
-            <a:off x="5376672" y="2926080"/>
-            <a:ext cx="3291840" cy="274320"/>
+            <a:off x="5376672" y="1645920"/>
+            <a:ext cx="3291840" cy="205740"/>
           </a:xfrm>
           <a:prstGeom prst="rect">
             <a:avLst/>
@@ -7624,8 +7624,8 @@
         </p:nvSpPr>
         <p:spPr>
           <a:xfrm>
-            <a:off x="5376672" y="3227832"/>
-            <a:ext cx="3291840" cy="457200"/>
+            <a:off x="5376672" y="1872691"/>
+            <a:ext cx="3291840" cy="342900"/>
           </a:xfrm>
           <a:prstGeom prst="rect">
             <a:avLst/>
@@ -7663,8 +7663,8 @@
         </p:nvSpPr>
         <p:spPr>
           <a:xfrm>
-            <a:off x="4846320" y="3931920"/>
-            <a:ext cx="411480" cy="411480"/>
+            <a:off x="4846320" y="2211934"/>
+            <a:ext cx="411480" cy="309067"/>
           </a:xfrm>
           <a:prstGeom prst="ellipse">
             <a:avLst/>
@@ -7688,8 +7688,8 @@
         </p:nvSpPr>
         <p:spPr>
           <a:xfrm>
-            <a:off x="4846320" y="3931920"/>
-            <a:ext cx="411480" cy="411480"/>
+            <a:off x="4846320" y="2211934"/>
+            <a:ext cx="411480" cy="309067"/>
           </a:xfrm>
           <a:prstGeom prst="rect">
             <a:avLst/>
@@ -7727,8 +7727,8 @@
         </p:nvSpPr>
         <p:spPr>
           <a:xfrm>
-            <a:off x="5376672" y="3931920"/>
-            <a:ext cx="3291840" cy="274320"/>
+            <a:off x="5376672" y="2211934"/>
+            <a:ext cx="3291840" cy="205740"/>
           </a:xfrm>
           <a:prstGeom prst="rect">
             <a:avLst/>
@@ -7766,8 +7766,8 @@
         </p:nvSpPr>
         <p:spPr>
           <a:xfrm>
-            <a:off x="5376672" y="4233672"/>
-            <a:ext cx="3291840" cy="457200"/>
+            <a:off x="5376672" y="2438705"/>
+            <a:ext cx="3291840" cy="342900"/>
           </a:xfrm>
           <a:prstGeom prst="rect">
             <a:avLst/>
@@ -7805,8 +7805,8 @@
         </p:nvSpPr>
         <p:spPr>
           <a:xfrm>
-            <a:off x="0" y="6492240"/>
-            <a:ext cx="9144000" cy="365760"/>
+            <a:off x="0" y="4869180"/>
+            <a:ext cx="9144000" cy="274320"/>
           </a:xfrm>
           <a:prstGeom prst="rect">
             <a:avLst/>
@@ -7830,8 +7830,8 @@
         </p:nvSpPr>
         <p:spPr>
           <a:xfrm>
-            <a:off x="0" y="6492240"/>
-            <a:ext cx="9144000" cy="365760"/>
+            <a:off x="0" y="4869180"/>
+            <a:ext cx="9144000" cy="274320"/>
           </a:xfrm>
           <a:prstGeom prst="rect">
             <a:avLst/>
